--- a/260418_add/supplefigure_260420/SuppFig_S01_cohort_QC.pptx
+++ b/260418_add/supplefigure_260420/SuppFig_S01_cohort_QC.pptx
@@ -3169,7 +3169,7 @@
         </p:nvCxnSpPr>
         <p:spPr>
           <a:xfrm>
-            <a:off x="1645920" y="5760720"/>
+            <a:off x="1645920" y="5669280"/>
             <a:ext cx="9601200" cy="0"/>
           </a:xfrm>
           <a:prstGeom prst="line">
@@ -3205,8 +3205,8 @@
         </p:nvCxnSpPr>
         <p:spPr>
           <a:xfrm>
-            <a:off x="1645920" y="1188720"/>
-            <a:ext cx="0" cy="4572000"/>
+            <a:off x="1645920" y="1280160"/>
+            <a:ext cx="0" cy="4389120"/>
           </a:xfrm>
           <a:prstGeom prst="line">
             <a:avLst/>
@@ -3241,8 +3241,8 @@
         </p:nvCxnSpPr>
         <p:spPr>
           <a:xfrm>
-            <a:off x="11247120" y="1188720"/>
-            <a:ext cx="0" cy="4572000"/>
+            <a:off x="11247120" y="1280160"/>
+            <a:ext cx="0" cy="4389120"/>
           </a:xfrm>
           <a:prstGeom prst="line">
             <a:avLst/>
@@ -3277,7 +3277,7 @@
         </p:nvCxnSpPr>
         <p:spPr>
           <a:xfrm>
-            <a:off x="1645920" y="1188720"/>
+            <a:off x="1645920" y="1280160"/>
             <a:ext cx="9601200" cy="0"/>
           </a:xfrm>
           <a:prstGeom prst="line">
@@ -3313,7 +3313,7 @@
         </p:nvCxnSpPr>
         <p:spPr>
           <a:xfrm>
-            <a:off x="1581912" y="5760720"/>
+            <a:off x="1581912" y="5669280"/>
             <a:ext cx="64008" cy="0"/>
           </a:xfrm>
           <a:prstGeom prst="line">
@@ -3349,7 +3349,7 @@
         </p:nvSpPr>
         <p:spPr>
           <a:xfrm>
-            <a:off x="1143000" y="5678424"/>
+            <a:off x="1143000" y="5586984"/>
             <a:ext cx="438912" cy="164592"/>
           </a:xfrm>
           <a:prstGeom prst="rect">
@@ -3385,7 +3385,7 @@
         </p:nvCxnSpPr>
         <p:spPr>
           <a:xfrm>
-            <a:off x="1581912" y="4998720"/>
+            <a:off x="1581912" y="4937760"/>
             <a:ext cx="64008" cy="0"/>
           </a:xfrm>
           <a:prstGeom prst="line">
@@ -3421,7 +3421,7 @@
         </p:nvSpPr>
         <p:spPr>
           <a:xfrm>
-            <a:off x="1143000" y="4916424"/>
+            <a:off x="1143000" y="4855464"/>
             <a:ext cx="438912" cy="164592"/>
           </a:xfrm>
           <a:prstGeom prst="rect">
@@ -3457,7 +3457,7 @@
         </p:nvCxnSpPr>
         <p:spPr>
           <a:xfrm>
-            <a:off x="1581912" y="4236720"/>
+            <a:off x="1581912" y="4206240"/>
             <a:ext cx="64008" cy="0"/>
           </a:xfrm>
           <a:prstGeom prst="line">
@@ -3493,7 +3493,7 @@
         </p:nvSpPr>
         <p:spPr>
           <a:xfrm>
-            <a:off x="1143000" y="4154424"/>
+            <a:off x="1143000" y="4123944"/>
             <a:ext cx="438912" cy="164592"/>
           </a:xfrm>
           <a:prstGeom prst="rect">
@@ -3601,7 +3601,7 @@
         </p:nvCxnSpPr>
         <p:spPr>
           <a:xfrm>
-            <a:off x="1581912" y="2712720"/>
+            <a:off x="1581912" y="2743200"/>
             <a:ext cx="64008" cy="0"/>
           </a:xfrm>
           <a:prstGeom prst="line">
@@ -3637,7 +3637,7 @@
         </p:nvSpPr>
         <p:spPr>
           <a:xfrm>
-            <a:off x="1143000" y="2630424"/>
+            <a:off x="1143000" y="2660904"/>
             <a:ext cx="438912" cy="164592"/>
           </a:xfrm>
           <a:prstGeom prst="rect">
@@ -3673,7 +3673,7 @@
         </p:nvCxnSpPr>
         <p:spPr>
           <a:xfrm>
-            <a:off x="1581912" y="1950720"/>
+            <a:off x="1581912" y="2011680"/>
             <a:ext cx="64008" cy="0"/>
           </a:xfrm>
           <a:prstGeom prst="line">
@@ -3709,7 +3709,7 @@
         </p:nvSpPr>
         <p:spPr>
           <a:xfrm>
-            <a:off x="1143000" y="1868424"/>
+            <a:off x="1143000" y="1929384"/>
             <a:ext cx="438912" cy="164592"/>
           </a:xfrm>
           <a:prstGeom prst="rect">
@@ -3745,7 +3745,7 @@
         </p:nvCxnSpPr>
         <p:spPr>
           <a:xfrm>
-            <a:off x="1581912" y="1188720"/>
+            <a:off x="1581912" y="1280160"/>
             <a:ext cx="64008" cy="0"/>
           </a:xfrm>
           <a:prstGeom prst="line">
@@ -3781,7 +3781,7 @@
         </p:nvSpPr>
         <p:spPr>
           <a:xfrm>
-            <a:off x="1143000" y="1106424"/>
+            <a:off x="1143000" y="1197864"/>
             <a:ext cx="438912" cy="164592"/>
           </a:xfrm>
           <a:prstGeom prst="rect">
@@ -3853,8 +3853,240 @@
         </p:nvSpPr>
         <p:spPr>
           <a:xfrm>
-            <a:off x="1993392" y="3322320"/>
-            <a:ext cx="402336" cy="2438400"/>
+            <a:off x="1645920" y="1261872"/>
+            <a:ext cx="4800600" cy="4407408"/>
+          </a:xfrm>
+          <a:prstGeom prst="rect">
+            <a:avLst/>
+          </a:prstGeom>
+          <a:solidFill>
+            <a:srgbClr val="F0F7F5"/>
+          </a:solidFill>
+          <a:ln>
+            <a:noFill/>
+          </a:ln>
+          <a:effectLst/>
+        </p:spPr>
+        <p:style>
+          <a:lnRef idx="1">
+            <a:schemeClr val="accent1"/>
+          </a:lnRef>
+          <a:fillRef idx="3">
+            <a:schemeClr val="accent1"/>
+          </a:fillRef>
+          <a:effectRef idx="2">
+            <a:schemeClr val="accent1"/>
+          </a:effectRef>
+          <a:fontRef idx="minor">
+            <a:schemeClr val="lt1"/>
+          </a:fontRef>
+        </p:style>
+        <p:txBody>
+          <a:bodyPr rtlCol="0" anchor="ctr"/>
+          <a:lstStyle/>
+          <a:p>
+            <a:pPr algn="ctr"/>
+          </a:p>
+        </p:txBody>
+      </p:sp>
+      <p:sp>
+        <p:nvSpPr>
+          <p:cNvPr id="24" name="Rectangle 23"/>
+          <p:cNvSpPr/>
+          <p:nvPr/>
+        </p:nvSpPr>
+        <p:spPr>
+          <a:xfrm>
+            <a:off x="6446520" y="1261872"/>
+            <a:ext cx="4800600" cy="4407408"/>
+          </a:xfrm>
+          <a:prstGeom prst="rect">
+            <a:avLst/>
+          </a:prstGeom>
+          <a:solidFill>
+            <a:srgbClr val="FAF0EC"/>
+          </a:solidFill>
+          <a:ln>
+            <a:noFill/>
+          </a:ln>
+          <a:effectLst/>
+        </p:spPr>
+        <p:style>
+          <a:lnRef idx="1">
+            <a:schemeClr val="accent1"/>
+          </a:lnRef>
+          <a:fillRef idx="3">
+            <a:schemeClr val="accent1"/>
+          </a:fillRef>
+          <a:effectRef idx="2">
+            <a:schemeClr val="accent1"/>
+          </a:effectRef>
+          <a:fontRef idx="minor">
+            <a:schemeClr val="lt1"/>
+          </a:fontRef>
+        </p:style>
+        <p:txBody>
+          <a:bodyPr rtlCol="0" anchor="ctr"/>
+          <a:lstStyle/>
+          <a:p>
+            <a:pPr algn="ctr"/>
+          </a:p>
+        </p:txBody>
+      </p:sp>
+      <p:cxnSp>
+        <p:nvCxnSpPr>
+          <p:cNvPr id="25" name="Connector 24"/>
+          <p:cNvCxnSpPr/>
+          <p:nvPr/>
+        </p:nvCxnSpPr>
+        <p:spPr>
+          <a:xfrm>
+            <a:off x="1645920" y="5669280"/>
+            <a:ext cx="9601200" cy="0"/>
+          </a:xfrm>
+          <a:prstGeom prst="line">
+            <a:avLst/>
+          </a:prstGeom>
+          <a:ln w="12700">
+            <a:solidFill>
+              <a:srgbClr val="222222"/>
+            </a:solidFill>
+          </a:ln>
+          <a:effectLst/>
+        </p:spPr>
+        <p:style>
+          <a:lnRef idx="2">
+            <a:schemeClr val="accent1"/>
+          </a:lnRef>
+          <a:fillRef idx="0">
+            <a:schemeClr val="accent1"/>
+          </a:fillRef>
+          <a:effectRef idx="1">
+            <a:schemeClr val="accent1"/>
+          </a:effectRef>
+          <a:fontRef idx="minor">
+            <a:schemeClr val="tx1"/>
+          </a:fontRef>
+        </p:style>
+      </p:cxnSp>
+      <p:cxnSp>
+        <p:nvCxnSpPr>
+          <p:cNvPr id="26" name="Connector 25"/>
+          <p:cNvCxnSpPr/>
+          <p:nvPr/>
+        </p:nvCxnSpPr>
+        <p:spPr>
+          <a:xfrm>
+            <a:off x="1645920" y="1280160"/>
+            <a:ext cx="0" cy="4389120"/>
+          </a:xfrm>
+          <a:prstGeom prst="line">
+            <a:avLst/>
+          </a:prstGeom>
+          <a:ln w="12700">
+            <a:solidFill>
+              <a:srgbClr val="222222"/>
+            </a:solidFill>
+          </a:ln>
+          <a:effectLst/>
+        </p:spPr>
+        <p:style>
+          <a:lnRef idx="2">
+            <a:schemeClr val="accent1"/>
+          </a:lnRef>
+          <a:fillRef idx="0">
+            <a:schemeClr val="accent1"/>
+          </a:fillRef>
+          <a:effectRef idx="1">
+            <a:schemeClr val="accent1"/>
+          </a:effectRef>
+          <a:fontRef idx="minor">
+            <a:schemeClr val="tx1"/>
+          </a:fontRef>
+        </p:style>
+      </p:cxnSp>
+      <p:sp>
+        <p:nvSpPr>
+          <p:cNvPr id="27" name="TextBox 26"/>
+          <p:cNvSpPr txBox="1"/>
+          <p:nvPr/>
+        </p:nvSpPr>
+        <p:spPr>
+          <a:xfrm>
+            <a:off x="1645920" y="960120"/>
+            <a:ext cx="4800600" cy="201168"/>
+          </a:xfrm>
+          <a:prstGeom prst="rect">
+            <a:avLst/>
+          </a:prstGeom>
+          <a:noFill/>
+          <a:effectLst/>
+        </p:spPr>
+        <p:txBody>
+          <a:bodyPr wrap="square" lIns="0" rIns="0" tIns="0" bIns="0" anchor="ctr">
+            <a:spAutoFit/>
+          </a:bodyPr>
+          <a:lstStyle/>
+          <a:p>
+            <a:pPr algn="ctr"/>
+            <a:r>
+              <a:rPr sz="1000" b="1" i="0">
+                <a:solidFill>
+                  <a:srgbClr val="0E4A68"/>
+                </a:solidFill>
+                <a:latin typeface="Arial"/>
+              </a:rPr>
+              <a:t>WES (whole-exome)</a:t>
+            </a:r>
+          </a:p>
+        </p:txBody>
+      </p:sp>
+      <p:sp>
+        <p:nvSpPr>
+          <p:cNvPr id="28" name="TextBox 27"/>
+          <p:cNvSpPr txBox="1"/>
+          <p:nvPr/>
+        </p:nvSpPr>
+        <p:spPr>
+          <a:xfrm>
+            <a:off x="6446520" y="960120"/>
+            <a:ext cx="4800600" cy="201168"/>
+          </a:xfrm>
+          <a:prstGeom prst="rect">
+            <a:avLst/>
+          </a:prstGeom>
+          <a:noFill/>
+          <a:effectLst/>
+        </p:spPr>
+        <p:txBody>
+          <a:bodyPr wrap="square" lIns="0" rIns="0" tIns="0" bIns="0" anchor="ctr">
+            <a:spAutoFit/>
+          </a:bodyPr>
+          <a:lstStyle/>
+          <a:p>
+            <a:pPr algn="ctr"/>
+            <a:r>
+              <a:rPr sz="1000" b="1" i="0">
+                <a:solidFill>
+                  <a:srgbClr val="8A2B4C"/>
+                </a:solidFill>
+                <a:latin typeface="Arial"/>
+              </a:rPr>
+              <a:t>RNA-seq</a:t>
+            </a:r>
+          </a:p>
+        </p:txBody>
+      </p:sp>
+      <p:sp>
+        <p:nvSpPr>
+          <p:cNvPr id="29" name="Rectangle 28"/>
+          <p:cNvSpPr/>
+          <p:nvPr/>
+        </p:nvSpPr>
+        <p:spPr>
+          <a:xfrm>
+            <a:off x="1993392" y="3328416"/>
+            <a:ext cx="402336" cy="2340864"/>
           </a:xfrm>
           <a:prstGeom prst="rect">
             <a:avLst/>
@@ -3893,13 +4125,13 @@
       </p:sp>
       <p:sp>
         <p:nvSpPr>
-          <p:cNvPr id="24" name="TextBox 23"/>
+          <p:cNvPr id="30" name="TextBox 29"/>
           <p:cNvSpPr txBox="1"/>
           <p:nvPr/>
         </p:nvSpPr>
         <p:spPr>
           <a:xfrm>
-            <a:off x="1920240" y="3102864"/>
+            <a:off x="1920240" y="3108960"/>
             <a:ext cx="548640" cy="182880"/>
           </a:xfrm>
           <a:prstGeom prst="rect">
@@ -3916,7 +4148,7 @@
           <a:p>
             <a:pPr algn="ctr"/>
             <a:r>
-              <a:rPr sz="800" b="1" i="0">
+              <a:rPr sz="900" b="1" i="0">
                 <a:solidFill>
                   <a:srgbClr val="0A7D6E"/>
                 </a:solidFill>
@@ -3929,14 +4161,14 @@
       </p:sp>
       <p:sp>
         <p:nvSpPr>
-          <p:cNvPr id="25" name="Rectangle 24"/>
+          <p:cNvPr id="31" name="Rectangle 30"/>
           <p:cNvSpPr/>
           <p:nvPr/>
         </p:nvSpPr>
         <p:spPr>
           <a:xfrm>
-            <a:off x="2496312" y="3931920"/>
-            <a:ext cx="402336" cy="1828800"/>
+            <a:off x="2496312" y="3913632"/>
+            <a:ext cx="402336" cy="1755648"/>
           </a:xfrm>
           <a:prstGeom prst="rect">
             <a:avLst/>
@@ -3975,13 +4207,13 @@
       </p:sp>
       <p:sp>
         <p:nvSpPr>
-          <p:cNvPr id="26" name="TextBox 25"/>
+          <p:cNvPr id="32" name="TextBox 31"/>
           <p:cNvSpPr txBox="1"/>
           <p:nvPr/>
         </p:nvSpPr>
         <p:spPr>
           <a:xfrm>
-            <a:off x="2423160" y="3712464"/>
+            <a:off x="2423160" y="3694176"/>
             <a:ext cx="548640" cy="182880"/>
           </a:xfrm>
           <a:prstGeom prst="rect">
@@ -3998,7 +4230,7 @@
           <a:p>
             <a:pPr algn="ctr"/>
             <a:r>
-              <a:rPr sz="800" b="1" i="0">
+              <a:rPr sz="900" b="1" i="0">
                 <a:solidFill>
                   <a:srgbClr val="C53E1F"/>
                 </a:solidFill>
@@ -4011,13 +4243,13 @@
       </p:sp>
       <p:sp>
         <p:nvSpPr>
-          <p:cNvPr id="27" name="TextBox 26"/>
+          <p:cNvPr id="33" name="TextBox 32"/>
           <p:cNvSpPr txBox="1"/>
           <p:nvPr/>
         </p:nvSpPr>
         <p:spPr>
           <a:xfrm>
-            <a:off x="1714500" y="5833872"/>
+            <a:off x="1714500" y="5742432"/>
             <a:ext cx="1463040" cy="365760"/>
           </a:xfrm>
           <a:prstGeom prst="rect">
@@ -4034,27 +4266,27 @@
           <a:p>
             <a:pPr algn="ctr"/>
             <a:r>
-              <a:rPr sz="900" b="0" i="0">
+              <a:rPr sz="1000" b="1" i="0">
                 <a:solidFill>
                   <a:srgbClr val="222222"/>
                 </a:solidFill>
                 <a:latin typeface="Arial"/>
               </a:rPr>
-              <a:t>WES normal</a:t>
-            </a:r>
-          </a:p>
-        </p:txBody>
-      </p:sp>
-      <p:sp>
-        <p:nvSpPr>
-          <p:cNvPr id="28" name="Rectangle 27"/>
+              <a:t>normal</a:t>
+            </a:r>
+          </a:p>
+        </p:txBody>
+      </p:sp>
+      <p:sp>
+        <p:nvSpPr>
+          <p:cNvPr id="34" name="Rectangle 33"/>
           <p:cNvSpPr/>
           <p:nvPr/>
         </p:nvSpPr>
         <p:spPr>
           <a:xfrm>
-            <a:off x="3593592" y="3017520"/>
-            <a:ext cx="402336" cy="2743200"/>
+            <a:off x="3593592" y="3035808"/>
+            <a:ext cx="402336" cy="2633472"/>
           </a:xfrm>
           <a:prstGeom prst="rect">
             <a:avLst/>
@@ -4093,13 +4325,13 @@
       </p:sp>
       <p:sp>
         <p:nvSpPr>
-          <p:cNvPr id="29" name="TextBox 28"/>
+          <p:cNvPr id="35" name="TextBox 34"/>
           <p:cNvSpPr txBox="1"/>
           <p:nvPr/>
         </p:nvSpPr>
         <p:spPr>
           <a:xfrm>
-            <a:off x="3520440" y="2798064"/>
+            <a:off x="3520440" y="2816352"/>
             <a:ext cx="548640" cy="182880"/>
           </a:xfrm>
           <a:prstGeom prst="rect">
@@ -4116,7 +4348,7 @@
           <a:p>
             <a:pPr algn="ctr"/>
             <a:r>
-              <a:rPr sz="800" b="1" i="0">
+              <a:rPr sz="900" b="1" i="0">
                 <a:solidFill>
                   <a:srgbClr val="0A7D6E"/>
                 </a:solidFill>
@@ -4129,14 +4361,14 @@
       </p:sp>
       <p:sp>
         <p:nvSpPr>
-          <p:cNvPr id="30" name="Rectangle 29"/>
+          <p:cNvPr id="36" name="Rectangle 35"/>
           <p:cNvSpPr/>
           <p:nvPr/>
         </p:nvSpPr>
         <p:spPr>
           <a:xfrm>
-            <a:off x="4096512" y="3169920"/>
-            <a:ext cx="402336" cy="2590800"/>
+            <a:off x="4096512" y="3182112"/>
+            <a:ext cx="402336" cy="2487168"/>
           </a:xfrm>
           <a:prstGeom prst="rect">
             <a:avLst/>
@@ -4175,13 +4407,13 @@
       </p:sp>
       <p:sp>
         <p:nvSpPr>
-          <p:cNvPr id="31" name="TextBox 30"/>
+          <p:cNvPr id="37" name="TextBox 36"/>
           <p:cNvSpPr txBox="1"/>
           <p:nvPr/>
         </p:nvSpPr>
         <p:spPr>
           <a:xfrm>
-            <a:off x="4023360" y="2950464"/>
+            <a:off x="4023360" y="2962656"/>
             <a:ext cx="548640" cy="182880"/>
           </a:xfrm>
           <a:prstGeom prst="rect">
@@ -4198,7 +4430,7 @@
           <a:p>
             <a:pPr algn="ctr"/>
             <a:r>
-              <a:rPr sz="800" b="1" i="0">
+              <a:rPr sz="900" b="1" i="0">
                 <a:solidFill>
                   <a:srgbClr val="C53E1F"/>
                 </a:solidFill>
@@ -4211,13 +4443,13 @@
       </p:sp>
       <p:sp>
         <p:nvSpPr>
-          <p:cNvPr id="32" name="TextBox 31"/>
+          <p:cNvPr id="38" name="TextBox 37"/>
           <p:cNvSpPr txBox="1"/>
           <p:nvPr/>
         </p:nvSpPr>
         <p:spPr>
           <a:xfrm>
-            <a:off x="3314700" y="5833872"/>
+            <a:off x="3314700" y="5742432"/>
             <a:ext cx="1463040" cy="365760"/>
           </a:xfrm>
           <a:prstGeom prst="rect">
@@ -4234,27 +4466,27 @@
           <a:p>
             <a:pPr algn="ctr"/>
             <a:r>
-              <a:rPr sz="900" b="0" i="0">
+              <a:rPr sz="1000" b="1" i="0">
                 <a:solidFill>
                   <a:srgbClr val="222222"/>
                 </a:solidFill>
                 <a:latin typeface="Arial"/>
               </a:rPr>
-              <a:t>WES pre</a:t>
-            </a:r>
-          </a:p>
-        </p:txBody>
-      </p:sp>
-      <p:sp>
-        <p:nvSpPr>
-          <p:cNvPr id="33" name="Rectangle 32"/>
+              <a:t>pre</a:t>
+            </a:r>
+          </a:p>
+        </p:txBody>
+      </p:sp>
+      <p:sp>
+        <p:nvSpPr>
+          <p:cNvPr id="39" name="Rectangle 38"/>
           <p:cNvSpPr/>
           <p:nvPr/>
         </p:nvSpPr>
         <p:spPr>
           <a:xfrm>
-            <a:off x="5193792" y="4693920"/>
-            <a:ext cx="402336" cy="1066800"/>
+            <a:off x="5193792" y="4645152"/>
+            <a:ext cx="402336" cy="1024128"/>
           </a:xfrm>
           <a:prstGeom prst="rect">
             <a:avLst/>
@@ -4293,13 +4525,13 @@
       </p:sp>
       <p:sp>
         <p:nvSpPr>
-          <p:cNvPr id="34" name="TextBox 33"/>
+          <p:cNvPr id="40" name="TextBox 39"/>
           <p:cNvSpPr txBox="1"/>
           <p:nvPr/>
         </p:nvSpPr>
         <p:spPr>
           <a:xfrm>
-            <a:off x="5120640" y="4474464"/>
+            <a:off x="5120640" y="4425696"/>
             <a:ext cx="548640" cy="182880"/>
           </a:xfrm>
           <a:prstGeom prst="rect">
@@ -4316,7 +4548,7 @@
           <a:p>
             <a:pPr algn="ctr"/>
             <a:r>
-              <a:rPr sz="800" b="1" i="0">
+              <a:rPr sz="900" b="1" i="0">
                 <a:solidFill>
                   <a:srgbClr val="0A7D6E"/>
                 </a:solidFill>
@@ -4329,14 +4561,14 @@
       </p:sp>
       <p:sp>
         <p:nvSpPr>
-          <p:cNvPr id="35" name="Rectangle 34"/>
+          <p:cNvPr id="41" name="Rectangle 40"/>
           <p:cNvSpPr/>
           <p:nvPr/>
         </p:nvSpPr>
         <p:spPr>
           <a:xfrm>
-            <a:off x="5696712" y="4693920"/>
-            <a:ext cx="402336" cy="1066800"/>
+            <a:off x="5696712" y="4645152"/>
+            <a:ext cx="402336" cy="1024128"/>
           </a:xfrm>
           <a:prstGeom prst="rect">
             <a:avLst/>
@@ -4375,13 +4607,13 @@
       </p:sp>
       <p:sp>
         <p:nvSpPr>
-          <p:cNvPr id="36" name="TextBox 35"/>
+          <p:cNvPr id="42" name="TextBox 41"/>
           <p:cNvSpPr txBox="1"/>
           <p:nvPr/>
         </p:nvSpPr>
         <p:spPr>
           <a:xfrm>
-            <a:off x="5623560" y="4474464"/>
+            <a:off x="5623560" y="4425696"/>
             <a:ext cx="548640" cy="182880"/>
           </a:xfrm>
           <a:prstGeom prst="rect">
@@ -4398,7 +4630,7 @@
           <a:p>
             <a:pPr algn="ctr"/>
             <a:r>
-              <a:rPr sz="800" b="1" i="0">
+              <a:rPr sz="900" b="1" i="0">
                 <a:solidFill>
                   <a:srgbClr val="C53E1F"/>
                 </a:solidFill>
@@ -4411,13 +4643,13 @@
       </p:sp>
       <p:sp>
         <p:nvSpPr>
-          <p:cNvPr id="37" name="TextBox 36"/>
+          <p:cNvPr id="43" name="TextBox 42"/>
           <p:cNvSpPr txBox="1"/>
           <p:nvPr/>
         </p:nvSpPr>
         <p:spPr>
           <a:xfrm>
-            <a:off x="4914900" y="5833872"/>
+            <a:off x="4914900" y="5742432"/>
             <a:ext cx="1463040" cy="365760"/>
           </a:xfrm>
           <a:prstGeom prst="rect">
@@ -4434,27 +4666,27 @@
           <a:p>
             <a:pPr algn="ctr"/>
             <a:r>
-              <a:rPr sz="900" b="0" i="0">
+              <a:rPr sz="1000" b="1" i="0">
                 <a:solidFill>
                   <a:srgbClr val="222222"/>
                 </a:solidFill>
                 <a:latin typeface="Arial"/>
               </a:rPr>
-              <a:t>WES post</a:t>
-            </a:r>
-          </a:p>
-        </p:txBody>
-      </p:sp>
-      <p:sp>
-        <p:nvSpPr>
-          <p:cNvPr id="38" name="Rectangle 37"/>
+              <a:t>post</a:t>
+            </a:r>
+          </a:p>
+        </p:txBody>
+      </p:sp>
+      <p:sp>
+        <p:nvSpPr>
+          <p:cNvPr id="44" name="Rectangle 43"/>
           <p:cNvSpPr/>
           <p:nvPr/>
         </p:nvSpPr>
         <p:spPr>
           <a:xfrm>
-            <a:off x="6793992" y="4693920"/>
-            <a:ext cx="402336" cy="1066800"/>
+            <a:off x="6793992" y="4645152"/>
+            <a:ext cx="402336" cy="1024128"/>
           </a:xfrm>
           <a:prstGeom prst="rect">
             <a:avLst/>
@@ -4493,13 +4725,13 @@
       </p:sp>
       <p:sp>
         <p:nvSpPr>
-          <p:cNvPr id="39" name="TextBox 38"/>
+          <p:cNvPr id="45" name="TextBox 44"/>
           <p:cNvSpPr txBox="1"/>
           <p:nvPr/>
         </p:nvSpPr>
         <p:spPr>
           <a:xfrm>
-            <a:off x="6720840" y="4474464"/>
+            <a:off x="6720840" y="4425696"/>
             <a:ext cx="548640" cy="182880"/>
           </a:xfrm>
           <a:prstGeom prst="rect">
@@ -4516,7 +4748,7 @@
           <a:p>
             <a:pPr algn="ctr"/>
             <a:r>
-              <a:rPr sz="800" b="1" i="0">
+              <a:rPr sz="900" b="1" i="0">
                 <a:solidFill>
                   <a:srgbClr val="0A7D6E"/>
                 </a:solidFill>
@@ -4529,14 +4761,14 @@
       </p:sp>
       <p:sp>
         <p:nvSpPr>
-          <p:cNvPr id="40" name="Rectangle 39"/>
+          <p:cNvPr id="46" name="Rectangle 45"/>
           <p:cNvSpPr/>
           <p:nvPr/>
         </p:nvSpPr>
         <p:spPr>
           <a:xfrm>
-            <a:off x="7296912" y="5303520"/>
-            <a:ext cx="402336" cy="457200"/>
+            <a:off x="7296912" y="5230368"/>
+            <a:ext cx="402336" cy="438912"/>
           </a:xfrm>
           <a:prstGeom prst="rect">
             <a:avLst/>
@@ -4575,13 +4807,13 @@
       </p:sp>
       <p:sp>
         <p:nvSpPr>
-          <p:cNvPr id="41" name="TextBox 40"/>
+          <p:cNvPr id="47" name="TextBox 46"/>
           <p:cNvSpPr txBox="1"/>
           <p:nvPr/>
         </p:nvSpPr>
         <p:spPr>
           <a:xfrm>
-            <a:off x="7223760" y="5084064"/>
+            <a:off x="7223760" y="5010912"/>
             <a:ext cx="548640" cy="182880"/>
           </a:xfrm>
           <a:prstGeom prst="rect">
@@ -4598,7 +4830,7 @@
           <a:p>
             <a:pPr algn="ctr"/>
             <a:r>
-              <a:rPr sz="800" b="1" i="0">
+              <a:rPr sz="900" b="1" i="0">
                 <a:solidFill>
                   <a:srgbClr val="C53E1F"/>
                 </a:solidFill>
@@ -4611,13 +4843,13 @@
       </p:sp>
       <p:sp>
         <p:nvSpPr>
-          <p:cNvPr id="42" name="TextBox 41"/>
+          <p:cNvPr id="48" name="TextBox 47"/>
           <p:cNvSpPr txBox="1"/>
           <p:nvPr/>
         </p:nvSpPr>
         <p:spPr>
           <a:xfrm>
-            <a:off x="6515100" y="5833872"/>
+            <a:off x="6515100" y="5742432"/>
             <a:ext cx="1463040" cy="365760"/>
           </a:xfrm>
           <a:prstGeom prst="rect">
@@ -4634,27 +4866,27 @@
           <a:p>
             <a:pPr algn="ctr"/>
             <a:r>
-              <a:rPr sz="900" b="0" i="0">
+              <a:rPr sz="1000" b="1" i="0">
                 <a:solidFill>
                   <a:srgbClr val="222222"/>
                 </a:solidFill>
                 <a:latin typeface="Arial"/>
               </a:rPr>
-              <a:t>RNA normal</a:t>
-            </a:r>
-          </a:p>
-        </p:txBody>
-      </p:sp>
-      <p:sp>
-        <p:nvSpPr>
-          <p:cNvPr id="43" name="Rectangle 42"/>
+              <a:t>normal</a:t>
+            </a:r>
+          </a:p>
+        </p:txBody>
+      </p:sp>
+      <p:sp>
+        <p:nvSpPr>
+          <p:cNvPr id="49" name="Rectangle 48"/>
           <p:cNvSpPr/>
           <p:nvPr/>
         </p:nvSpPr>
         <p:spPr>
           <a:xfrm>
-            <a:off x="8394192" y="3169920"/>
-            <a:ext cx="402336" cy="2590800"/>
+            <a:off x="8394192" y="3182112"/>
+            <a:ext cx="402336" cy="2487168"/>
           </a:xfrm>
           <a:prstGeom prst="rect">
             <a:avLst/>
@@ -4693,13 +4925,13 @@
       </p:sp>
       <p:sp>
         <p:nvSpPr>
-          <p:cNvPr id="44" name="TextBox 43"/>
+          <p:cNvPr id="50" name="TextBox 49"/>
           <p:cNvSpPr txBox="1"/>
           <p:nvPr/>
         </p:nvSpPr>
         <p:spPr>
           <a:xfrm>
-            <a:off x="8321040" y="2950464"/>
+            <a:off x="8321040" y="2962656"/>
             <a:ext cx="548640" cy="182880"/>
           </a:xfrm>
           <a:prstGeom prst="rect">
@@ -4716,7 +4948,7 @@
           <a:p>
             <a:pPr algn="ctr"/>
             <a:r>
-              <a:rPr sz="800" b="1" i="0">
+              <a:rPr sz="900" b="1" i="0">
                 <a:solidFill>
                   <a:srgbClr val="0A7D6E"/>
                 </a:solidFill>
@@ -4729,14 +4961,14 @@
       </p:sp>
       <p:sp>
         <p:nvSpPr>
-          <p:cNvPr id="45" name="Rectangle 44"/>
+          <p:cNvPr id="51" name="Rectangle 50"/>
           <p:cNvSpPr/>
           <p:nvPr/>
         </p:nvSpPr>
         <p:spPr>
           <a:xfrm>
-            <a:off x="8897112" y="3322320"/>
-            <a:ext cx="402336" cy="2438400"/>
+            <a:off x="8897112" y="3328416"/>
+            <a:ext cx="402336" cy="2340864"/>
           </a:xfrm>
           <a:prstGeom prst="rect">
             <a:avLst/>
@@ -4775,13 +5007,13 @@
       </p:sp>
       <p:sp>
         <p:nvSpPr>
-          <p:cNvPr id="46" name="TextBox 45"/>
+          <p:cNvPr id="52" name="TextBox 51"/>
           <p:cNvSpPr txBox="1"/>
           <p:nvPr/>
         </p:nvSpPr>
         <p:spPr>
           <a:xfrm>
-            <a:off x="8823960" y="3102864"/>
+            <a:off x="8823960" y="3108960"/>
             <a:ext cx="548640" cy="182880"/>
           </a:xfrm>
           <a:prstGeom prst="rect">
@@ -4798,7 +5030,7 @@
           <a:p>
             <a:pPr algn="ctr"/>
             <a:r>
-              <a:rPr sz="800" b="1" i="0">
+              <a:rPr sz="900" b="1" i="0">
                 <a:solidFill>
                   <a:srgbClr val="C53E1F"/>
                 </a:solidFill>
@@ -4811,13 +5043,13 @@
       </p:sp>
       <p:sp>
         <p:nvSpPr>
-          <p:cNvPr id="47" name="TextBox 46"/>
+          <p:cNvPr id="53" name="TextBox 52"/>
           <p:cNvSpPr txBox="1"/>
           <p:nvPr/>
         </p:nvSpPr>
         <p:spPr>
           <a:xfrm>
-            <a:off x="8115300" y="5833872"/>
+            <a:off x="8115300" y="5742432"/>
             <a:ext cx="1463040" cy="365760"/>
           </a:xfrm>
           <a:prstGeom prst="rect">
@@ -4834,27 +5066,27 @@
           <a:p>
             <a:pPr algn="ctr"/>
             <a:r>
-              <a:rPr sz="900" b="0" i="0">
+              <a:rPr sz="1000" b="1" i="0">
                 <a:solidFill>
                   <a:srgbClr val="222222"/>
                 </a:solidFill>
                 <a:latin typeface="Arial"/>
               </a:rPr>
-              <a:t>RNA pre</a:t>
-            </a:r>
-          </a:p>
-        </p:txBody>
-      </p:sp>
-      <p:sp>
-        <p:nvSpPr>
-          <p:cNvPr id="48" name="Rectangle 47"/>
+              <a:t>pre</a:t>
+            </a:r>
+          </a:p>
+        </p:txBody>
+      </p:sp>
+      <p:sp>
+        <p:nvSpPr>
+          <p:cNvPr id="54" name="Rectangle 53"/>
           <p:cNvSpPr/>
           <p:nvPr/>
         </p:nvSpPr>
         <p:spPr>
           <a:xfrm>
-            <a:off x="9994392" y="4846320"/>
-            <a:ext cx="402336" cy="914400"/>
+            <a:off x="9994392" y="4791456"/>
+            <a:ext cx="402336" cy="877824"/>
           </a:xfrm>
           <a:prstGeom prst="rect">
             <a:avLst/>
@@ -4893,13 +5125,13 @@
       </p:sp>
       <p:sp>
         <p:nvSpPr>
-          <p:cNvPr id="49" name="TextBox 48"/>
+          <p:cNvPr id="55" name="TextBox 54"/>
           <p:cNvSpPr txBox="1"/>
           <p:nvPr/>
         </p:nvSpPr>
         <p:spPr>
           <a:xfrm>
-            <a:off x="9921240" y="4626864"/>
+            <a:off x="9921240" y="4572000"/>
             <a:ext cx="548640" cy="182880"/>
           </a:xfrm>
           <a:prstGeom prst="rect">
@@ -4916,7 +5148,7 @@
           <a:p>
             <a:pPr algn="ctr"/>
             <a:r>
-              <a:rPr sz="800" b="1" i="0">
+              <a:rPr sz="900" b="1" i="0">
                 <a:solidFill>
                   <a:srgbClr val="0A7D6E"/>
                 </a:solidFill>
@@ -4929,14 +5161,14 @@
       </p:sp>
       <p:sp>
         <p:nvSpPr>
-          <p:cNvPr id="50" name="Rectangle 49"/>
+          <p:cNvPr id="56" name="Rectangle 55"/>
           <p:cNvSpPr/>
           <p:nvPr/>
         </p:nvSpPr>
         <p:spPr>
           <a:xfrm>
-            <a:off x="10497312" y="4693920"/>
-            <a:ext cx="402336" cy="1066800"/>
+            <a:off x="10497312" y="4645152"/>
+            <a:ext cx="402336" cy="1024128"/>
           </a:xfrm>
           <a:prstGeom prst="rect">
             <a:avLst/>
@@ -4975,13 +5207,13 @@
       </p:sp>
       <p:sp>
         <p:nvSpPr>
-          <p:cNvPr id="51" name="TextBox 50"/>
+          <p:cNvPr id="57" name="TextBox 56"/>
           <p:cNvSpPr txBox="1"/>
           <p:nvPr/>
         </p:nvSpPr>
         <p:spPr>
           <a:xfrm>
-            <a:off x="10424160" y="4474464"/>
+            <a:off x="10424160" y="4425696"/>
             <a:ext cx="548640" cy="182880"/>
           </a:xfrm>
           <a:prstGeom prst="rect">
@@ -4998,7 +5230,7 @@
           <a:p>
             <a:pPr algn="ctr"/>
             <a:r>
-              <a:rPr sz="800" b="1" i="0">
+              <a:rPr sz="900" b="1" i="0">
                 <a:solidFill>
                   <a:srgbClr val="C53E1F"/>
                 </a:solidFill>
@@ -5011,13 +5243,13 @@
       </p:sp>
       <p:sp>
         <p:nvSpPr>
-          <p:cNvPr id="52" name="TextBox 51"/>
+          <p:cNvPr id="58" name="TextBox 57"/>
           <p:cNvSpPr txBox="1"/>
           <p:nvPr/>
         </p:nvSpPr>
         <p:spPr>
           <a:xfrm>
-            <a:off x="9715500" y="5833872"/>
+            <a:off x="9715500" y="5742432"/>
             <a:ext cx="1463040" cy="365760"/>
           </a:xfrm>
           <a:prstGeom prst="rect">
@@ -5034,36 +5266,38 @@
           <a:p>
             <a:pPr algn="ctr"/>
             <a:r>
-              <a:rPr sz="900" b="0" i="0">
+              <a:rPr sz="1000" b="1" i="0">
                 <a:solidFill>
                   <a:srgbClr val="222222"/>
                 </a:solidFill>
                 <a:latin typeface="Arial"/>
               </a:rPr>
-              <a:t>RNA post</a:t>
-            </a:r>
-          </a:p>
-        </p:txBody>
-      </p:sp>
-      <p:sp>
-        <p:nvSpPr>
-          <p:cNvPr id="53" name="Rectangle 52"/>
+              <a:t>post</a:t>
+            </a:r>
+          </a:p>
+        </p:txBody>
+      </p:sp>
+      <p:sp>
+        <p:nvSpPr>
+          <p:cNvPr id="59" name="Rectangle 58"/>
           <p:cNvSpPr/>
           <p:nvPr/>
         </p:nvSpPr>
         <p:spPr>
           <a:xfrm>
-            <a:off x="10515600" y="731520"/>
-            <a:ext cx="182880" cy="109728"/>
+            <a:off x="365760" y="6172200"/>
+            <a:ext cx="2743200" cy="384048"/>
           </a:xfrm>
           <a:prstGeom prst="rect">
             <a:avLst/>
           </a:prstGeom>
           <a:solidFill>
-            <a:srgbClr val="0A7D6E"/>
+            <a:srgbClr val="9FC9BE"/>
           </a:solidFill>
-          <a:ln>
-            <a:noFill/>
+          <a:ln w="10160">
+            <a:solidFill>
+              <a:srgbClr val="222222"/>
+            </a:solidFill>
           </a:ln>
           <a:effectLst/>
         </p:spPr>
@@ -5091,14 +5325,14 @@
       </p:sp>
       <p:sp>
         <p:nvSpPr>
-          <p:cNvPr id="54" name="TextBox 53"/>
+          <p:cNvPr id="60" name="TextBox 59"/>
           <p:cNvSpPr txBox="1"/>
           <p:nvPr/>
         </p:nvSpPr>
         <p:spPr>
           <a:xfrm>
-            <a:off x="10744200" y="713232"/>
-            <a:ext cx="1097280" cy="182880"/>
+            <a:off x="365760" y="6172200"/>
+            <a:ext cx="2743200" cy="384048"/>
           </a:xfrm>
           <a:prstGeom prst="rect">
             <a:avLst/>
@@ -5112,38 +5346,40 @@
           </a:bodyPr>
           <a:lstStyle/>
           <a:p>
-            <a:pPr algn="l"/>
-            <a:r>
-              <a:rPr sz="900" b="0" i="0">
+            <a:pPr algn="ctr"/>
+            <a:r>
+              <a:rPr sz="1000" b="1" i="0">
                 <a:solidFill>
                   <a:srgbClr val="222222"/>
                 </a:solidFill>
                 <a:latin typeface="Arial"/>
               </a:rPr>
-              <a:t>good (18)</a:t>
-            </a:r>
-          </a:p>
-        </p:txBody>
-      </p:sp>
-      <p:sp>
-        <p:nvSpPr>
-          <p:cNvPr id="55" name="Rectangle 54"/>
+              <a:t>MSS: 41 / 41 tumors (max MSI 0.19 %)</a:t>
+            </a:r>
+          </a:p>
+        </p:txBody>
+      </p:sp>
+      <p:sp>
+        <p:nvSpPr>
+          <p:cNvPr id="61" name="Rectangle 60"/>
           <p:cNvSpPr/>
           <p:nvPr/>
         </p:nvSpPr>
         <p:spPr>
           <a:xfrm>
-            <a:off x="10515600" y="914400"/>
-            <a:ext cx="182880" cy="109728"/>
+            <a:off x="3246120" y="6172200"/>
+            <a:ext cx="2743200" cy="384048"/>
           </a:xfrm>
           <a:prstGeom prst="rect">
             <a:avLst/>
           </a:prstGeom>
           <a:solidFill>
-            <a:srgbClr val="C53E1F"/>
+            <a:srgbClr val="9FC9BE"/>
           </a:solidFill>
-          <a:ln>
-            <a:noFill/>
+          <a:ln w="10160">
+            <a:solidFill>
+              <a:srgbClr val="222222"/>
+            </a:solidFill>
           </a:ln>
           <a:effectLst/>
         </p:spPr>
@@ -5171,14 +5407,14 @@
       </p:sp>
       <p:sp>
         <p:nvSpPr>
-          <p:cNvPr id="56" name="TextBox 55"/>
+          <p:cNvPr id="62" name="TextBox 61"/>
           <p:cNvSpPr txBox="1"/>
           <p:nvPr/>
         </p:nvSpPr>
         <p:spPr>
           <a:xfrm>
-            <a:off x="10744200" y="896112"/>
-            <a:ext cx="1097280" cy="182880"/>
+            <a:off x="3246120" y="6172200"/>
+            <a:ext cx="2743200" cy="384048"/>
           </a:xfrm>
           <a:prstGeom prst="rect">
             <a:avLst/>
@@ -5192,15 +5428,97 @@
           </a:bodyPr>
           <a:lstStyle/>
           <a:p>
-            <a:pPr algn="l"/>
-            <a:r>
-              <a:rPr sz="900" b="0" i="0">
+            <a:pPr algn="ctr"/>
+            <a:r>
+              <a:rPr sz="1000" b="1" i="0">
                 <a:solidFill>
                   <a:srgbClr val="222222"/>
                 </a:solidFill>
                 <a:latin typeface="Arial"/>
               </a:rPr>
-              <a:t>bad (17)</a:t>
+              <a:t>TMB-low: median 1.6 / Mb</a:t>
+            </a:r>
+          </a:p>
+        </p:txBody>
+      </p:sp>
+      <p:sp>
+        <p:nvSpPr>
+          <p:cNvPr id="63" name="Rectangle 62"/>
+          <p:cNvSpPr/>
+          <p:nvPr/>
+        </p:nvSpPr>
+        <p:spPr>
+          <a:xfrm>
+            <a:off x="6126480" y="6172200"/>
+            <a:ext cx="2743200" cy="384048"/>
+          </a:xfrm>
+          <a:prstGeom prst="rect">
+            <a:avLst/>
+          </a:prstGeom>
+          <a:solidFill>
+            <a:srgbClr val="D4A300"/>
+          </a:solidFill>
+          <a:ln w="10160">
+            <a:solidFill>
+              <a:srgbClr val="222222"/>
+            </a:solidFill>
+          </a:ln>
+          <a:effectLst/>
+        </p:spPr>
+        <p:style>
+          <a:lnRef idx="1">
+            <a:schemeClr val="accent1"/>
+          </a:lnRef>
+          <a:fillRef idx="3">
+            <a:schemeClr val="accent1"/>
+          </a:fillRef>
+          <a:effectRef idx="2">
+            <a:schemeClr val="accent1"/>
+          </a:effectRef>
+          <a:fontRef idx="minor">
+            <a:schemeClr val="lt1"/>
+          </a:fontRef>
+        </p:style>
+        <p:txBody>
+          <a:bodyPr rtlCol="0" anchor="ctr"/>
+          <a:lstStyle/>
+          <a:p>
+            <a:pPr algn="ctr"/>
+          </a:p>
+        </p:txBody>
+      </p:sp>
+      <p:sp>
+        <p:nvSpPr>
+          <p:cNvPr id="64" name="TextBox 63"/>
+          <p:cNvSpPr txBox="1"/>
+          <p:nvPr/>
+        </p:nvSpPr>
+        <p:spPr>
+          <a:xfrm>
+            <a:off x="6126480" y="6172200"/>
+            <a:ext cx="2743200" cy="384048"/>
+          </a:xfrm>
+          <a:prstGeom prst="rect">
+            <a:avLst/>
+          </a:prstGeom>
+          <a:noFill/>
+          <a:effectLst/>
+        </p:spPr>
+        <p:txBody>
+          <a:bodyPr wrap="square" lIns="0" rIns="0" tIns="0" bIns="0" anchor="ctr">
+            <a:spAutoFit/>
+          </a:bodyPr>
+          <a:lstStyle/>
+          <a:p>
+            <a:pPr algn="ctr"/>
+            <a:r>
+              <a:rPr sz="1000" b="1" i="0">
+                <a:solidFill>
+                  <a:srgbClr val="222222"/>
+                </a:solidFill>
+                <a:latin typeface="Arial"/>
+              </a:rPr>
+              <a:t>pCR target: 18 / 35 eventual good</a:t>
             </a:r>
           </a:p>
         </p:txBody>
@@ -5290,7 +5608,7 @@
                 </a:solidFill>
                 <a:latin typeface="Arial"/>
               </a:rPr>
-              <a:t>TMB (nonsyn / Mb) by response group — pre-tumor samples only</a:t>
+              <a:t>TMB (nonsyn / Mb) by response — pre-tumor samples</a:t>
             </a:r>
           </a:p>
         </p:txBody>
@@ -5303,8 +5621,8 @@
         </p:nvCxnSpPr>
         <p:spPr>
           <a:xfrm>
-            <a:off x="3657600" y="5760720"/>
-            <a:ext cx="4572000" cy="0"/>
+            <a:off x="3657600" y="6035040"/>
+            <a:ext cx="4846320" cy="0"/>
           </a:xfrm>
           <a:prstGeom prst="line">
             <a:avLst/>
@@ -5340,7 +5658,7 @@
         <p:spPr>
           <a:xfrm>
             <a:off x="3657600" y="1188720"/>
-            <a:ext cx="0" cy="4572000"/>
+            <a:ext cx="0" cy="4846320"/>
           </a:xfrm>
           <a:prstGeom prst="line">
             <a:avLst/>
@@ -5375,8 +5693,8 @@
         </p:nvCxnSpPr>
         <p:spPr>
           <a:xfrm>
-            <a:off x="8229600" y="1188720"/>
-            <a:ext cx="0" cy="4572000"/>
+            <a:off x="8503920" y="1188720"/>
+            <a:ext cx="0" cy="4846320"/>
           </a:xfrm>
           <a:prstGeom prst="line">
             <a:avLst/>
@@ -5412,7 +5730,7 @@
         <p:spPr>
           <a:xfrm>
             <a:off x="3657600" y="1188720"/>
-            <a:ext cx="4572000" cy="0"/>
+            <a:ext cx="4846320" cy="0"/>
           </a:xfrm>
           <a:prstGeom prst="line">
             <a:avLst/>
@@ -5447,7 +5765,7 @@
         </p:nvCxnSpPr>
         <p:spPr>
           <a:xfrm>
-            <a:off x="3593592" y="5760720"/>
+            <a:off x="3593592" y="6035040"/>
             <a:ext cx="64008" cy="0"/>
           </a:xfrm>
           <a:prstGeom prst="line">
@@ -5483,7 +5801,7 @@
         </p:nvSpPr>
         <p:spPr>
           <a:xfrm>
-            <a:off x="3154680" y="5678424"/>
+            <a:off x="3154680" y="5952744"/>
             <a:ext cx="438912" cy="164592"/>
           </a:xfrm>
           <a:prstGeom prst="rect">
@@ -5519,7 +5837,7 @@
         </p:nvCxnSpPr>
         <p:spPr>
           <a:xfrm>
-            <a:off x="3593592" y="4846320"/>
+            <a:off x="3593592" y="5065776"/>
             <a:ext cx="64008" cy="0"/>
           </a:xfrm>
           <a:prstGeom prst="line">
@@ -5555,7 +5873,7 @@
         </p:nvSpPr>
         <p:spPr>
           <a:xfrm>
-            <a:off x="3154680" y="4764024"/>
+            <a:off x="3154680" y="4983480"/>
             <a:ext cx="438912" cy="164592"/>
           </a:xfrm>
           <a:prstGeom prst="rect">
@@ -5591,7 +5909,7 @@
         </p:nvCxnSpPr>
         <p:spPr>
           <a:xfrm>
-            <a:off x="3593592" y="3931920"/>
+            <a:off x="3593592" y="4096512"/>
             <a:ext cx="64008" cy="0"/>
           </a:xfrm>
           <a:prstGeom prst="line">
@@ -5627,7 +5945,7 @@
         </p:nvSpPr>
         <p:spPr>
           <a:xfrm>
-            <a:off x="3154680" y="3849624"/>
+            <a:off x="3154680" y="4014216"/>
             <a:ext cx="438912" cy="164592"/>
           </a:xfrm>
           <a:prstGeom prst="rect">
@@ -5663,7 +5981,7 @@
         </p:nvCxnSpPr>
         <p:spPr>
           <a:xfrm>
-            <a:off x="3593592" y="3017520"/>
+            <a:off x="3593592" y="3127248"/>
             <a:ext cx="64008" cy="0"/>
           </a:xfrm>
           <a:prstGeom prst="line">
@@ -5699,7 +6017,7 @@
         </p:nvSpPr>
         <p:spPr>
           <a:xfrm>
-            <a:off x="3154680" y="2935224"/>
+            <a:off x="3154680" y="3044952"/>
             <a:ext cx="438912" cy="164592"/>
           </a:xfrm>
           <a:prstGeom prst="rect">
@@ -5735,7 +6053,7 @@
         </p:nvCxnSpPr>
         <p:spPr>
           <a:xfrm>
-            <a:off x="3593592" y="2103120"/>
+            <a:off x="3593592" y="2157984"/>
             <a:ext cx="64008" cy="0"/>
           </a:xfrm>
           <a:prstGeom prst="line">
@@ -5771,7 +6089,7 @@
         </p:nvSpPr>
         <p:spPr>
           <a:xfrm>
-            <a:off x="3154680" y="2020824"/>
+            <a:off x="3154680" y="2075688"/>
             <a:ext cx="438912" cy="164592"/>
           </a:xfrm>
           <a:prstGeom prst="rect">
@@ -5879,7 +6197,7 @@
         </p:nvSpPr>
         <p:spPr>
           <a:xfrm>
-            <a:off x="2788920" y="2468880"/>
+            <a:off x="2788920" y="2606040"/>
             <a:ext cx="365760" cy="2011680"/>
           </a:xfrm>
           <a:prstGeom prst="rect">
@@ -5915,8 +6233,8 @@
         </p:nvCxnSpPr>
         <p:spPr>
           <a:xfrm flipV="1">
-            <a:off x="4800600" y="3090672"/>
-            <a:ext cx="0" cy="2633472"/>
+            <a:off x="4869180" y="3204789"/>
+            <a:ext cx="0" cy="2791480"/>
           </a:xfrm>
           <a:prstGeom prst="line">
             <a:avLst/>
@@ -5951,8 +6269,8 @@
         </p:nvCxnSpPr>
         <p:spPr>
           <a:xfrm>
-            <a:off x="4594860" y="5724144"/>
-            <a:ext cx="411480" cy="0"/>
+            <a:off x="4652010" y="5996269"/>
+            <a:ext cx="434340" cy="0"/>
           </a:xfrm>
           <a:prstGeom prst="line">
             <a:avLst/>
@@ -5987,8 +6305,8 @@
         </p:nvCxnSpPr>
         <p:spPr>
           <a:xfrm>
-            <a:off x="4594860" y="3090672"/>
-            <a:ext cx="411480" cy="0"/>
+            <a:off x="4652010" y="3204789"/>
+            <a:ext cx="434340" cy="0"/>
           </a:xfrm>
           <a:prstGeom prst="line">
             <a:avLst/>
@@ -6023,8 +6341,8 @@
         </p:nvSpPr>
         <p:spPr>
           <a:xfrm>
-            <a:off x="4389120" y="5150358"/>
-            <a:ext cx="822960" cy="1"/>
+            <a:off x="4434840" y="5388056"/>
+            <a:ext cx="868680" cy="1"/>
           </a:xfrm>
           <a:prstGeom prst="rect">
             <a:avLst/>
@@ -6067,8 +6385,8 @@
         </p:nvCxnSpPr>
         <p:spPr>
           <a:xfrm>
-            <a:off x="4389120" y="4882896"/>
-            <a:ext cx="822960" cy="0"/>
+            <a:off x="4434840" y="5104547"/>
+            <a:ext cx="868680" cy="0"/>
           </a:xfrm>
           <a:prstGeom prst="line">
             <a:avLst/>
@@ -6103,8 +6421,8 @@
         </p:nvSpPr>
         <p:spPr>
           <a:xfrm>
-            <a:off x="4936010" y="3058668"/>
-            <a:ext cx="64008" cy="64008"/>
+            <a:off x="4816971" y="3154497"/>
+            <a:ext cx="100584" cy="100584"/>
           </a:xfrm>
           <a:prstGeom prst="ellipse">
             <a:avLst/>
@@ -6147,8 +6465,8 @@
         </p:nvSpPr>
         <p:spPr>
           <a:xfrm>
-            <a:off x="4914733" y="3305556"/>
-            <a:ext cx="64008" cy="64008"/>
+            <a:off x="4826054" y="3416198"/>
+            <a:ext cx="100584" cy="100584"/>
           </a:xfrm>
           <a:prstGeom prst="ellipse">
             <a:avLst/>
@@ -6191,8 +6509,8 @@
         </p:nvSpPr>
         <p:spPr>
           <a:xfrm>
-            <a:off x="4792663" y="3396996"/>
-            <a:ext cx="64008" cy="64008"/>
+            <a:off x="5025712" y="3513125"/>
+            <a:ext cx="100584" cy="100584"/>
           </a:xfrm>
           <a:prstGeom prst="ellipse">
             <a:avLst/>
@@ -6235,8 +6553,8 @@
         </p:nvSpPr>
         <p:spPr>
           <a:xfrm>
-            <a:off x="4758072" y="4585716"/>
-            <a:ext cx="64008" cy="64008"/>
+            <a:off x="4835890" y="4773168"/>
+            <a:ext cx="100584" cy="100584"/>
           </a:xfrm>
           <a:prstGeom prst="ellipse">
             <a:avLst/>
@@ -6279,8 +6597,8 @@
         </p:nvSpPr>
         <p:spPr>
           <a:xfrm>
-            <a:off x="4973530" y="4613148"/>
-            <a:ext cx="64008" cy="64008"/>
+            <a:off x="4859637" y="4802246"/>
+            <a:ext cx="100584" cy="100584"/>
           </a:xfrm>
           <a:prstGeom prst="ellipse">
             <a:avLst/>
@@ -6323,8 +6641,8 @@
         </p:nvSpPr>
         <p:spPr>
           <a:xfrm>
-            <a:off x="4709544" y="4677156"/>
-            <a:ext cx="64008" cy="64008"/>
+            <a:off x="4752333" y="4870094"/>
+            <a:ext cx="100584" cy="100584"/>
           </a:xfrm>
           <a:prstGeom prst="ellipse">
             <a:avLst/>
@@ -6367,8 +6685,8 @@
         </p:nvSpPr>
         <p:spPr>
           <a:xfrm>
-            <a:off x="4963433" y="4759452"/>
-            <a:ext cx="64008" cy="64008"/>
+            <a:off x="5002891" y="4957328"/>
+            <a:ext cx="100584" cy="100584"/>
           </a:xfrm>
           <a:prstGeom prst="ellipse">
             <a:avLst/>
@@ -6411,8 +6729,8 @@
         </p:nvSpPr>
         <p:spPr>
           <a:xfrm>
-            <a:off x="4701516" y="4796028"/>
-            <a:ext cx="64008" cy="64008"/>
+            <a:off x="4811569" y="4996099"/>
+            <a:ext cx="100584" cy="100584"/>
           </a:xfrm>
           <a:prstGeom prst="ellipse">
             <a:avLst/>
@@ -6455,8 +6773,8 @@
         </p:nvSpPr>
         <p:spPr>
           <a:xfrm>
-            <a:off x="4644050" y="4823460"/>
-            <a:ext cx="64008" cy="64008"/>
+            <a:off x="4741478" y="5025177"/>
+            <a:ext cx="100584" cy="100584"/>
           </a:xfrm>
           <a:prstGeom prst="ellipse">
             <a:avLst/>
@@ -6499,8 +6817,8 @@
         </p:nvSpPr>
         <p:spPr>
           <a:xfrm>
-            <a:off x="4903795" y="4878324"/>
-            <a:ext cx="64008" cy="64008"/>
+            <a:off x="4680595" y="5083332"/>
+            <a:ext cx="100584" cy="100584"/>
           </a:xfrm>
           <a:prstGeom prst="ellipse">
             <a:avLst/>
@@ -6543,8 +6861,8 @@
         </p:nvSpPr>
         <p:spPr>
           <a:xfrm>
-            <a:off x="4952798" y="4887468"/>
-            <a:ext cx="64008" cy="64008"/>
+            <a:off x="4696708" y="5093025"/>
+            <a:ext cx="100584" cy="100584"/>
           </a:xfrm>
           <a:prstGeom prst="ellipse">
             <a:avLst/>
@@ -6587,8 +6905,8 @@
         </p:nvSpPr>
         <p:spPr>
           <a:xfrm>
-            <a:off x="4570503" y="4988052"/>
-            <a:ext cx="64008" cy="64008"/>
+            <a:off x="4963598" y="5199644"/>
+            <a:ext cx="100584" cy="100584"/>
           </a:xfrm>
           <a:prstGeom prst="ellipse">
             <a:avLst/>
@@ -6631,8 +6949,8 @@
         </p:nvSpPr>
         <p:spPr>
           <a:xfrm>
-            <a:off x="4936797" y="5097780"/>
-            <a:ext cx="64008" cy="64008"/>
+            <a:off x="4671285" y="5315956"/>
+            <a:ext cx="100584" cy="100584"/>
           </a:xfrm>
           <a:prstGeom prst="ellipse">
             <a:avLst/>
@@ -6675,8 +6993,8 @@
         </p:nvSpPr>
         <p:spPr>
           <a:xfrm>
-            <a:off x="4574627" y="5125212"/>
-            <a:ext cx="64008" cy="64008"/>
+            <a:off x="4626453" y="5345034"/>
+            <a:ext cx="100584" cy="100584"/>
           </a:xfrm>
           <a:prstGeom prst="ellipse">
             <a:avLst/>
@@ -6719,8 +7037,8 @@
         </p:nvSpPr>
         <p:spPr>
           <a:xfrm>
-            <a:off x="4766096" y="5317236"/>
-            <a:ext cx="64008" cy="64008"/>
+            <a:off x="4829712" y="5548579"/>
+            <a:ext cx="100584" cy="100584"/>
           </a:xfrm>
           <a:prstGeom prst="ellipse">
             <a:avLst/>
@@ -6763,8 +7081,8 @@
         </p:nvSpPr>
         <p:spPr>
           <a:xfrm>
-            <a:off x="4829223" y="5426964"/>
-            <a:ext cx="64008" cy="64008"/>
+            <a:off x="4980783" y="5664891"/>
+            <a:ext cx="100584" cy="100584"/>
           </a:xfrm>
           <a:prstGeom prst="ellipse">
             <a:avLst/>
@@ -6807,8 +7125,8 @@
         </p:nvSpPr>
         <p:spPr>
           <a:xfrm>
-            <a:off x="4573482" y="5682996"/>
-            <a:ext cx="64008" cy="64008"/>
+            <a:off x="4726029" y="5936285"/>
+            <a:ext cx="100584" cy="100584"/>
           </a:xfrm>
           <a:prstGeom prst="ellipse">
             <a:avLst/>
@@ -6851,8 +7169,8 @@
         </p:nvSpPr>
         <p:spPr>
           <a:xfrm>
-            <a:off x="4674555" y="5692140"/>
-            <a:ext cx="64008" cy="64008"/>
+            <a:off x="5021746" y="5945977"/>
+            <a:ext cx="100584" cy="100584"/>
           </a:xfrm>
           <a:prstGeom prst="ellipse">
             <a:avLst/>
@@ -6895,8 +7213,8 @@
         </p:nvSpPr>
         <p:spPr>
           <a:xfrm>
-            <a:off x="3886200" y="5852160"/>
-            <a:ext cx="1828800" cy="228600"/>
+            <a:off x="3863340" y="6126480"/>
+            <a:ext cx="2011680" cy="228600"/>
           </a:xfrm>
           <a:prstGeom prst="rect">
             <a:avLst/>
@@ -6918,7 +7236,7 @@
                 </a:solidFill>
                 <a:latin typeface="Arial"/>
               </a:rPr>
-              <a:t>good (n=18)</a:t>
+              <a:t>good (n=18)  med=1.92</a:t>
             </a:r>
           </a:p>
         </p:txBody>
@@ -6931,8 +7249,8 @@
         </p:nvCxnSpPr>
         <p:spPr>
           <a:xfrm flipV="1">
-            <a:off x="7086600" y="2651760"/>
-            <a:ext cx="0" cy="3063240"/>
+            <a:off x="7292340" y="2739542"/>
+            <a:ext cx="0" cy="3247035"/>
           </a:xfrm>
           <a:prstGeom prst="line">
             <a:avLst/>
@@ -6967,8 +7285,8 @@
         </p:nvCxnSpPr>
         <p:spPr>
           <a:xfrm>
-            <a:off x="6880860" y="5715000"/>
-            <a:ext cx="411480" cy="0"/>
+            <a:off x="7075170" y="5986577"/>
+            <a:ext cx="434340" cy="0"/>
           </a:xfrm>
           <a:prstGeom prst="line">
             <a:avLst/>
@@ -7003,8 +7321,8 @@
         </p:nvCxnSpPr>
         <p:spPr>
           <a:xfrm>
-            <a:off x="6880860" y="2651760"/>
-            <a:ext cx="411480" cy="0"/>
+            <a:off x="7075170" y="2739542"/>
+            <a:ext cx="434340" cy="0"/>
           </a:xfrm>
           <a:prstGeom prst="line">
             <a:avLst/>
@@ -7039,8 +7357,8 @@
         </p:nvSpPr>
         <p:spPr>
           <a:xfrm>
-            <a:off x="6675120" y="5294376"/>
-            <a:ext cx="822960" cy="1"/>
+            <a:off x="6858000" y="5540715"/>
+            <a:ext cx="868680" cy="1"/>
           </a:xfrm>
           <a:prstGeom prst="rect">
             <a:avLst/>
@@ -7083,8 +7401,8 @@
         </p:nvCxnSpPr>
         <p:spPr>
           <a:xfrm>
-            <a:off x="6675120" y="4928616"/>
-            <a:ext cx="822960" cy="0"/>
+            <a:off x="6858000" y="5153010"/>
+            <a:ext cx="868680" cy="0"/>
           </a:xfrm>
           <a:prstGeom prst="line">
             <a:avLst/>
@@ -7119,8 +7437,8 @@
         </p:nvSpPr>
         <p:spPr>
           <a:xfrm>
-            <a:off x="7030191" y="2619756"/>
-            <a:ext cx="64008" cy="64008"/>
+            <a:off x="7359196" y="2689250"/>
+            <a:ext cx="100584" cy="100584"/>
           </a:xfrm>
           <a:prstGeom prst="ellipse">
             <a:avLst/>
@@ -7163,8 +7481,8 @@
         </p:nvSpPr>
         <p:spPr>
           <a:xfrm>
-            <a:off x="7115722" y="2756916"/>
-            <a:ext cx="64008" cy="64008"/>
+            <a:off x="7250392" y="2834640"/>
+            <a:ext cx="100584" cy="100584"/>
           </a:xfrm>
           <a:prstGeom prst="ellipse">
             <a:avLst/>
@@ -7207,8 +7525,8 @@
         </p:nvSpPr>
         <p:spPr>
           <a:xfrm>
-            <a:off x="6987300" y="3086100"/>
-            <a:ext cx="64008" cy="64008"/>
+            <a:off x="7229812" y="3183575"/>
+            <a:ext cx="100584" cy="100584"/>
           </a:xfrm>
           <a:prstGeom prst="ellipse">
             <a:avLst/>
@@ -7251,8 +7569,8 @@
         </p:nvSpPr>
         <p:spPr>
           <a:xfrm>
-            <a:off x="6979099" y="3186684"/>
-            <a:ext cx="64008" cy="64008"/>
+            <a:off x="7045292" y="3290194"/>
+            <a:ext cx="100584" cy="100584"/>
           </a:xfrm>
           <a:prstGeom prst="ellipse">
             <a:avLst/>
@@ -7295,8 +7613,8 @@
         </p:nvSpPr>
         <p:spPr>
           <a:xfrm>
-            <a:off x="6995306" y="4073652"/>
-            <a:ext cx="64008" cy="64008"/>
+            <a:off x="7077660" y="4230380"/>
+            <a:ext cx="100584" cy="100584"/>
           </a:xfrm>
           <a:prstGeom prst="ellipse">
             <a:avLst/>
@@ -7339,8 +7657,8 @@
         </p:nvSpPr>
         <p:spPr>
           <a:xfrm>
-            <a:off x="7015703" y="4732020"/>
-            <a:ext cx="64008" cy="64008"/>
+            <a:off x="7230924" y="4928250"/>
+            <a:ext cx="100584" cy="100584"/>
           </a:xfrm>
           <a:prstGeom prst="ellipse">
             <a:avLst/>
@@ -7383,8 +7701,8 @@
         </p:nvSpPr>
         <p:spPr>
           <a:xfrm>
-            <a:off x="6978222" y="4814316"/>
-            <a:ext cx="64008" cy="64008"/>
+            <a:off x="7102504" y="5015484"/>
+            <a:ext cx="100584" cy="100584"/>
           </a:xfrm>
           <a:prstGeom prst="ellipse">
             <a:avLst/>
@@ -7427,8 +7745,8 @@
         </p:nvSpPr>
         <p:spPr>
           <a:xfrm>
-            <a:off x="6850575" y="4860036"/>
-            <a:ext cx="64008" cy="64008"/>
+            <a:off x="7392700" y="5063947"/>
+            <a:ext cx="100584" cy="100584"/>
           </a:xfrm>
           <a:prstGeom prst="ellipse">
             <a:avLst/>
@@ -7471,8 +7789,8 @@
         </p:nvSpPr>
         <p:spPr>
           <a:xfrm>
-            <a:off x="7171127" y="4896612"/>
-            <a:ext cx="64008" cy="64008"/>
+            <a:off x="7243070" y="5102718"/>
+            <a:ext cx="100584" cy="100584"/>
           </a:xfrm>
           <a:prstGeom prst="ellipse">
             <a:avLst/>
@@ -7515,8 +7833,8 @@
         </p:nvSpPr>
         <p:spPr>
           <a:xfrm>
-            <a:off x="6902437" y="5024628"/>
-            <a:ext cx="64008" cy="64008"/>
+            <a:off x="7139030" y="5238415"/>
+            <a:ext cx="100584" cy="100584"/>
           </a:xfrm>
           <a:prstGeom prst="ellipse">
             <a:avLst/>
@@ -7559,8 +7877,8 @@
         </p:nvSpPr>
         <p:spPr>
           <a:xfrm>
-            <a:off x="7021642" y="5042916"/>
-            <a:ext cx="64008" cy="64008"/>
+            <a:off x="7252710" y="5257800"/>
+            <a:ext cx="100584" cy="100584"/>
           </a:xfrm>
           <a:prstGeom prst="ellipse">
             <a:avLst/>
@@ -7603,8 +7921,8 @@
         </p:nvSpPr>
         <p:spPr>
           <a:xfrm>
-            <a:off x="6891577" y="5134356"/>
-            <a:ext cx="64008" cy="64008"/>
+            <a:off x="7321609" y="5354726"/>
+            <a:ext cx="100584" cy="100584"/>
           </a:xfrm>
           <a:prstGeom prst="ellipse">
             <a:avLst/>
@@ -7647,8 +7965,8 @@
         </p:nvSpPr>
         <p:spPr>
           <a:xfrm>
-            <a:off x="7251186" y="5262372"/>
-            <a:ext cx="64008" cy="64008"/>
+            <a:off x="7233137" y="5490423"/>
+            <a:ext cx="100584" cy="100584"/>
           </a:xfrm>
           <a:prstGeom prst="ellipse">
             <a:avLst/>
@@ -7691,8 +8009,8 @@
         </p:nvSpPr>
         <p:spPr>
           <a:xfrm>
-            <a:off x="7245310" y="5326380"/>
-            <a:ext cx="64008" cy="64008"/>
+            <a:off x="7363888" y="5558272"/>
+            <a:ext cx="100584" cy="100584"/>
           </a:xfrm>
           <a:prstGeom prst="ellipse">
             <a:avLst/>
@@ -7735,8 +8053,8 @@
         </p:nvSpPr>
         <p:spPr>
           <a:xfrm>
-            <a:off x="6965460" y="5426964"/>
-            <a:ext cx="64008" cy="64008"/>
+            <a:off x="7427924" y="5664891"/>
+            <a:ext cx="100584" cy="100584"/>
           </a:xfrm>
           <a:prstGeom prst="ellipse">
             <a:avLst/>
@@ -7779,8 +8097,8 @@
         </p:nvSpPr>
         <p:spPr>
           <a:xfrm>
-            <a:off x="6977284" y="5655564"/>
-            <a:ext cx="64008" cy="64008"/>
+            <a:off x="7085552" y="5907207"/>
+            <a:ext cx="100584" cy="100584"/>
           </a:xfrm>
           <a:prstGeom prst="ellipse">
             <a:avLst/>
@@ -7823,8 +8141,8 @@
         </p:nvSpPr>
         <p:spPr>
           <a:xfrm>
-            <a:off x="7138224" y="5682996"/>
-            <a:ext cx="64008" cy="64008"/>
+            <a:off x="7122515" y="5936285"/>
+            <a:ext cx="100584" cy="100584"/>
           </a:xfrm>
           <a:prstGeom prst="ellipse">
             <a:avLst/>
@@ -7867,8 +8185,8 @@
         </p:nvSpPr>
         <p:spPr>
           <a:xfrm>
-            <a:off x="6172200" y="5852160"/>
-            <a:ext cx="1828800" cy="228600"/>
+            <a:off x="6286500" y="6126480"/>
+            <a:ext cx="2011680" cy="228600"/>
           </a:xfrm>
           <a:prstGeom prst="rect">
             <a:avLst/>
@@ -7890,21 +8208,186 @@
                 </a:solidFill>
                 <a:latin typeface="Arial"/>
               </a:rPr>
-              <a:t>bad (n=17)</a:t>
-            </a:r>
-          </a:p>
-        </p:txBody>
-      </p:sp>
-      <p:sp>
-        <p:nvSpPr>
-          <p:cNvPr id="68" name="TextBox 67"/>
+              <a:t>bad (n=17)  med=1.82</a:t>
+            </a:r>
+          </a:p>
+        </p:txBody>
+      </p:sp>
+      <p:cxnSp>
+        <p:nvCxnSpPr>
+          <p:cNvPr id="68" name="Connector 67"/>
+          <p:cNvCxnSpPr/>
+          <p:nvPr/>
+        </p:nvCxnSpPr>
+        <p:spPr>
+          <a:xfrm>
+            <a:off x="3657600" y="1188720"/>
+            <a:ext cx="4846320" cy="0"/>
+          </a:xfrm>
+          <a:prstGeom prst="line">
+            <a:avLst/>
+          </a:prstGeom>
+          <a:ln w="15240">
+            <a:solidFill>
+              <a:srgbClr val="D4A300"/>
+            </a:solidFill>
+            <a:prstDash val="dash"/>
+          </a:ln>
+          <a:effectLst/>
+        </p:spPr>
+        <p:style>
+          <a:lnRef idx="2">
+            <a:schemeClr val="accent1"/>
+          </a:lnRef>
+          <a:fillRef idx="0">
+            <a:schemeClr val="accent1"/>
+          </a:fillRef>
+          <a:effectRef idx="1">
+            <a:schemeClr val="accent1"/>
+          </a:effectRef>
+          <a:fontRef idx="minor">
+            <a:schemeClr val="tx1"/>
+          </a:fontRef>
+        </p:style>
+      </p:cxnSp>
+      <p:sp>
+        <p:nvSpPr>
+          <p:cNvPr id="69" name="Rectangle 68"/>
+          <p:cNvSpPr/>
+          <p:nvPr/>
+        </p:nvSpPr>
+        <p:spPr>
+          <a:xfrm>
+            <a:off x="8595360" y="1051560"/>
+            <a:ext cx="1737360" cy="274320"/>
+          </a:xfrm>
+          <a:prstGeom prst="rect">
+            <a:avLst/>
+          </a:prstGeom>
+          <a:solidFill>
+            <a:srgbClr val="D4A300"/>
+          </a:solidFill>
+          <a:ln w="10160">
+            <a:solidFill>
+              <a:srgbClr val="222222"/>
+            </a:solidFill>
+          </a:ln>
+          <a:effectLst/>
+        </p:spPr>
+        <p:style>
+          <a:lnRef idx="1">
+            <a:schemeClr val="accent1"/>
+          </a:lnRef>
+          <a:fillRef idx="3">
+            <a:schemeClr val="accent1"/>
+          </a:fillRef>
+          <a:effectRef idx="2">
+            <a:schemeClr val="accent1"/>
+          </a:effectRef>
+          <a:fontRef idx="minor">
+            <a:schemeClr val="lt1"/>
+          </a:fontRef>
+        </p:style>
+        <p:txBody>
+          <a:bodyPr rtlCol="0" anchor="ctr"/>
+          <a:lstStyle/>
+          <a:p>
+            <a:pPr algn="ctr"/>
+          </a:p>
+        </p:txBody>
+      </p:sp>
+      <p:sp>
+        <p:nvSpPr>
+          <p:cNvPr id="70" name="TextBox 69"/>
           <p:cNvSpPr txBox="1"/>
           <p:nvPr/>
         </p:nvSpPr>
         <p:spPr>
           <a:xfrm>
-            <a:off x="4846320" y="914400"/>
-            <a:ext cx="2194560" cy="228600"/>
+            <a:off x="8595360" y="1051560"/>
+            <a:ext cx="1737360" cy="274320"/>
+          </a:xfrm>
+          <a:prstGeom prst="rect">
+            <a:avLst/>
+          </a:prstGeom>
+          <a:noFill/>
+          <a:effectLst/>
+        </p:spPr>
+        <p:txBody>
+          <a:bodyPr wrap="square" lIns="0" rIns="0" tIns="0" bIns="0" anchor="ctr">
+            <a:spAutoFit/>
+          </a:bodyPr>
+          <a:lstStyle/>
+          <a:p>
+            <a:pPr algn="ctr"/>
+            <a:r>
+              <a:rPr sz="800" b="1" i="0">
+                <a:solidFill>
+                  <a:srgbClr val="222222"/>
+                </a:solidFill>
+                <a:latin typeface="Arial"/>
+              </a:rPr>
+              <a:t>MSI-high threshold (10/Mb)</a:t>
+            </a:r>
+          </a:p>
+        </p:txBody>
+      </p:sp>
+      <p:sp>
+        <p:nvSpPr>
+          <p:cNvPr id="71" name="Rectangle 70"/>
+          <p:cNvSpPr/>
+          <p:nvPr/>
+        </p:nvSpPr>
+        <p:spPr>
+          <a:xfrm>
+            <a:off x="4937760" y="868680"/>
+            <a:ext cx="2286000" cy="274320"/>
+          </a:xfrm>
+          <a:prstGeom prst="rect">
+            <a:avLst/>
+          </a:prstGeom>
+          <a:solidFill>
+            <a:srgbClr val="F0F0F0"/>
+          </a:solidFill>
+          <a:ln w="10160">
+            <a:solidFill>
+              <a:srgbClr val="222222"/>
+            </a:solidFill>
+          </a:ln>
+          <a:effectLst/>
+        </p:spPr>
+        <p:style>
+          <a:lnRef idx="1">
+            <a:schemeClr val="accent1"/>
+          </a:lnRef>
+          <a:fillRef idx="3">
+            <a:schemeClr val="accent1"/>
+          </a:fillRef>
+          <a:effectRef idx="2">
+            <a:schemeClr val="accent1"/>
+          </a:effectRef>
+          <a:fontRef idx="minor">
+            <a:schemeClr val="lt1"/>
+          </a:fontRef>
+        </p:style>
+        <p:txBody>
+          <a:bodyPr rtlCol="0" anchor="ctr"/>
+          <a:lstStyle/>
+          <a:p>
+            <a:pPr algn="ctr"/>
+          </a:p>
+        </p:txBody>
+      </p:sp>
+      <p:sp>
+        <p:nvSpPr>
+          <p:cNvPr id="72" name="TextBox 71"/>
+          <p:cNvSpPr txBox="1"/>
+          <p:nvPr/>
+        </p:nvSpPr>
+        <p:spPr>
+          <a:xfrm>
+            <a:off x="4937760" y="868680"/>
+            <a:ext cx="2286000" cy="274320"/>
           </a:xfrm>
           <a:prstGeom prst="rect">
             <a:avLst/>
@@ -7927,115 +8410,6 @@
                 <a:latin typeface="Arial"/>
               </a:rPr>
               <a:t>Mann–Whitney P = 0.987</a:t>
-            </a:r>
-          </a:p>
-        </p:txBody>
-      </p:sp>
-      <p:cxnSp>
-        <p:nvCxnSpPr>
-          <p:cNvPr id="69" name="Connector 68"/>
-          <p:cNvCxnSpPr/>
-          <p:nvPr/>
-        </p:nvCxnSpPr>
-        <p:spPr>
-          <a:xfrm>
-            <a:off x="3657600" y="1188720"/>
-            <a:ext cx="4572000" cy="0"/>
-          </a:xfrm>
-          <a:prstGeom prst="line">
-            <a:avLst/>
-          </a:prstGeom>
-          <a:ln w="12700">
-            <a:solidFill>
-              <a:srgbClr val="D4A300"/>
-            </a:solidFill>
-            <a:prstDash val="dash"/>
-          </a:ln>
-          <a:effectLst/>
-        </p:spPr>
-        <p:style>
-          <a:lnRef idx="2">
-            <a:schemeClr val="accent1"/>
-          </a:lnRef>
-          <a:fillRef idx="0">
-            <a:schemeClr val="accent1"/>
-          </a:fillRef>
-          <a:effectRef idx="1">
-            <a:schemeClr val="accent1"/>
-          </a:effectRef>
-          <a:fontRef idx="minor">
-            <a:schemeClr val="tx1"/>
-          </a:fontRef>
-        </p:style>
-      </p:cxnSp>
-      <p:sp>
-        <p:nvSpPr>
-          <p:cNvPr id="70" name="TextBox 69"/>
-          <p:cNvSpPr txBox="1"/>
-          <p:nvPr/>
-        </p:nvSpPr>
-        <p:spPr>
-          <a:xfrm>
-            <a:off x="8275320" y="1097280"/>
-            <a:ext cx="1828800" cy="182880"/>
-          </a:xfrm>
-          <a:prstGeom prst="rect">
-            <a:avLst/>
-          </a:prstGeom>
-          <a:noFill/>
-          <a:effectLst/>
-        </p:spPr>
-        <p:txBody>
-          <a:bodyPr wrap="square" lIns="0" rIns="0" tIns="0" bIns="0" anchor="ctr">
-            <a:spAutoFit/>
-          </a:bodyPr>
-          <a:lstStyle/>
-          <a:p>
-            <a:pPr algn="l"/>
-            <a:r>
-              <a:rPr sz="800" b="0" i="0">
-                <a:solidFill>
-                  <a:srgbClr val="D4A300"/>
-                </a:solidFill>
-                <a:latin typeface="Arial"/>
-              </a:rPr>
-              <a:t>10/Mb MSI-high threshold</a:t>
-            </a:r>
-          </a:p>
-        </p:txBody>
-      </p:sp>
-      <p:sp>
-        <p:nvSpPr>
-          <p:cNvPr id="71" name="TextBox 70"/>
-          <p:cNvSpPr txBox="1"/>
-          <p:nvPr/>
-        </p:nvSpPr>
-        <p:spPr>
-          <a:xfrm>
-            <a:off x="3657600" y="6263640"/>
-            <a:ext cx="4572000" cy="320040"/>
-          </a:xfrm>
-          <a:prstGeom prst="rect">
-            <a:avLst/>
-          </a:prstGeom>
-          <a:noFill/>
-          <a:effectLst/>
-        </p:spPr>
-        <p:txBody>
-          <a:bodyPr wrap="square" lIns="0" rIns="0" tIns="0" bIns="0" anchor="ctr">
-            <a:spAutoFit/>
-          </a:bodyPr>
-          <a:lstStyle/>
-          <a:p>
-            <a:pPr algn="ctr"/>
-            <a:r>
-              <a:rPr sz="900" b="0" i="1">
-                <a:solidFill>
-                  <a:srgbClr val="222222"/>
-                </a:solidFill>
-                <a:latin typeface="Arial"/>
-              </a:rPr>
-              <a:t>Median good 1.85 vs bad 1.40 (MSS, TMB-low throughout). All 41 matched tumors MSS (max MSI 0.19 %).</a:t>
             </a:r>
           </a:p>
         </p:txBody>
